--- a/assets/pptx/catalog-334.pptx
+++ b/assets/pptx/catalog-334.pptx
@@ -3495,7 +3495,7 @@
                 <a:ea typeface="Ebrima"/>
                 <a:cs typeface="Ebrima"/>
               </a:rPr>
-              <a:t>ባትረዳኝ ሆነህ አጠገቤ ከጐኔ (2x)</a:t>
+              <a:t>ባትረዳኝ ሆነህ አጠገቤ ከጐኔ 2x</a:t>
             </a:r>
           </a:p>
         </p:txBody>
@@ -3809,7 +3809,7 @@
                 <a:ea typeface="Ebrima"/>
                 <a:cs typeface="Ebrima"/>
               </a:rPr>
-              <a:t>ባትረዳኝ ሆነህ አጠገቤ ከጐኔ (2x)</a:t>
+              <a:t>ባትረዳኝ ሆነህ አጠገቤ ከጐኔ 2x</a:t>
             </a:r>
           </a:p>
         </p:txBody>
@@ -4105,7 +4105,7 @@
                 <a:ea typeface="Ebrima"/>
                 <a:cs typeface="Ebrima"/>
               </a:rPr>
-              <a:t>ባትረዳኝ ሆነህ አጠገቤ ከጐኔ (2x)</a:t>
+              <a:t>ባትረዳኝ ሆነህ አጠገቤ ከጐኔ 2x</a:t>
             </a:r>
           </a:p>
         </p:txBody>
@@ -4172,7 +4172,7 @@
                 <a:ea typeface="Ebrima"/>
                 <a:cs typeface="Ebrima"/>
               </a:rPr>
-              <a:t>በምህረትህ ብዛት ቤትህ እገባለሁ (2x)</a:t>
+              <a:t>በምህረትህ ብዛት ቤትህ እገባለሁ 2x</a:t>
             </a:r>
           </a:p>
           <a:p>
@@ -4190,7 +4190,7 @@
                 <a:ea typeface="Ebrima"/>
                 <a:cs typeface="Ebrima"/>
               </a:rPr>
-              <a:t>ስለምህረትህ ጌታ አመልክሃለሁ (2x)</a:t>
+              <a:t>ስለምህረትህ ጌታ አመልክሃለሁ 2x</a:t>
             </a:r>
           </a:p>
         </p:txBody>
@@ -4347,7 +4347,7 @@
                 <a:ea typeface="Ebrima"/>
                 <a:cs typeface="Ebrima"/>
               </a:rPr>
-              <a:t>ስምህን ላክብረው (2x)</a:t>
+              <a:t>ስምህን ላክብረው 2x</a:t>
             </a:r>
           </a:p>
         </p:txBody>
